--- a/课件/荣国平/软件质量与管理.第五讲.pptx
+++ b/课件/荣国平/软件质量与管理.第五讲.pptx
@@ -399,7 +399,7 @@
               <a:pPr>
                 <a:defRPr/>
               </a:pPr>
-              <a:t>2026/5/25</a:t>
+              <a:t>2026/6/27</a:t>
             </a:fld>
             <a:endParaRPr lang="en-US" altLang="zh-CN"/>
           </a:p>
